--- a/hgp-report/public/templates/shoot.pptx
+++ b/hgp-report/public/templates/shoot.pptx
@@ -3091,21 +3091,12 @@
         <p:nvPr/>
       </p:nvGrpSpPr>
       <p:grpSpPr/>
-      <p:pic>
-        <p:nvPicPr>
-          <p:cNvPr id="2" name="Picture 1" descr="cover-building.jpg"/>
-          <p:cNvPicPr>
-            <a:picLocks noChangeAspect="1"/>
-          </p:cNvPicPr>
+      <p:sp>
+        <p:nvSpPr>
+          <p:cNvPr id="2" name="Rectangle 1"/>
+          <p:cNvSpPr/>
           <p:nvPr/>
-        </p:nvPicPr>
-        <p:blipFill>
-          <a:blip r:embed="rId2"/>
-          <a:srcRect l="10221" r="10221"/>
-          <a:stretch>
-            <a:fillRect/>
-          </a:stretch>
-        </p:blipFill>
+        </p:nvSpPr>
         <p:spPr>
           <a:xfrm>
             <a:off x="0" y="0"/>
@@ -3114,87 +3105,9 @@
           <a:prstGeom prst="rect">
             <a:avLst/>
           </a:prstGeom>
-        </p:spPr>
-      </p:pic>
-      <p:sp>
-        <p:nvSpPr>
-          <p:cNvPr id="3" name="TextBox 2"/>
-          <p:cNvSpPr txBox="1"/>
-          <p:nvPr/>
-        </p:nvSpPr>
-        <p:spPr>
-          <a:xfrm>
-            <a:off x="0" y="0"/>
-            <a:ext cx="10696575" cy="7562850"/>
-          </a:xfrm>
-          <a:prstGeom prst="rect">
-            <a:avLst/>
-          </a:prstGeom>
-          <a:noFill/>
-        </p:spPr>
-        <p:txBody>
-          <a:bodyPr wrap="square" anchor="t" lIns="0" tIns="0" rIns="0" bIns="0"/>
-          <a:lstStyle/>
-          <a:p>
-            <a:pPr algn="l"/>
-            <a:r>
-              <a:rPr sz="600" b="0">
-                <a:solidFill>
-                  <a:srgbClr val="FFFFFF"/>
-                </a:solidFill>
-                <a:latin typeface="맑은 고딕"/>
-                <a:ea typeface="맑은 고딕"/>
-                <a:cs typeface="맑은 고딕"/>
-              </a:rPr>
-              <a:t>{%cover}</a:t>
-            </a:r>
-          </a:p>
-        </p:txBody>
-      </p:sp>
-      <p:sp>
-        <p:nvSpPr>
-          <p:cNvPr id="4" name="Rectangle 3"/>
-          <p:cNvSpPr/>
-          <p:nvPr/>
-        </p:nvSpPr>
-        <p:spPr>
-          <a:xfrm>
-            <a:off x="0" y="0"/>
-            <a:ext cx="10696575" cy="7562850"/>
-          </a:xfrm>
-          <a:prstGeom prst="rect">
-            <a:avLst/>
-          </a:prstGeom>
-          <a:gradFill rotWithShape="1">
-            <a:gsLst>
-              <a:gs pos="0">
-                <a:srgbClr val="091833">
-                  <a:alpha val="94000"/>
-                </a:srgbClr>
-              </a:gs>
-              <a:gs pos="34000">
-                <a:srgbClr val="0C2148">
-                  <a:alpha val="82000"/>
-                </a:srgbClr>
-              </a:gs>
-              <a:gs pos="60000">
-                <a:srgbClr val="0F2C5C">
-                  <a:alpha val="35000"/>
-                </a:srgbClr>
-              </a:gs>
-              <a:gs pos="82000">
-                <a:srgbClr val="0F2C5C">
-                  <a:alpha val="0"/>
-                </a:srgbClr>
-              </a:gs>
-              <a:gs pos="100000">
-                <a:srgbClr val="0F2C5C">
-                  <a:alpha val="0"/>
-                </a:srgbClr>
-              </a:gs>
-            </a:gsLst>
-            <a:lin ang="600000" scaled="0"/>
-          </a:gradFill>
+          <a:solidFill>
+            <a:srgbClr val="FFFFFF"/>
+          </a:solidFill>
           <a:ln>
             <a:noFill/>
           </a:ln>
@@ -3224,6 +3137,66 @@
       </p:sp>
       <p:pic>
         <p:nvPicPr>
+          <p:cNvPr id="3" name="Picture 2" descr="cover-building-night.jpg"/>
+          <p:cNvPicPr>
+            <a:picLocks noChangeAspect="1"/>
+          </p:cNvPicPr>
+          <p:nvPr/>
+        </p:nvPicPr>
+        <p:blipFill>
+          <a:blip r:embed="rId2"/>
+          <a:srcRect t="18" b="18"/>
+          <a:stretch>
+            <a:fillRect/>
+          </a:stretch>
+        </p:blipFill>
+        <p:spPr>
+          <a:xfrm>
+            <a:off x="0" y="3611880"/>
+            <a:ext cx="10696575" cy="3950970"/>
+          </a:xfrm>
+          <a:prstGeom prst="rect">
+            <a:avLst/>
+          </a:prstGeom>
+        </p:spPr>
+      </p:pic>
+      <p:sp>
+        <p:nvSpPr>
+          <p:cNvPr id="4" name="TextBox 3"/>
+          <p:cNvSpPr txBox="1"/>
+          <p:nvPr/>
+        </p:nvSpPr>
+        <p:spPr>
+          <a:xfrm>
+            <a:off x="0" y="3611880"/>
+            <a:ext cx="10696575" cy="3950970"/>
+          </a:xfrm>
+          <a:prstGeom prst="rect">
+            <a:avLst/>
+          </a:prstGeom>
+          <a:noFill/>
+        </p:spPr>
+        <p:txBody>
+          <a:bodyPr wrap="square" anchor="t" lIns="0" tIns="0" rIns="0" bIns="0"/>
+          <a:lstStyle/>
+          <a:p>
+            <a:pPr algn="l"/>
+            <a:r>
+              <a:rPr sz="600" b="0">
+                <a:solidFill>
+                  <a:srgbClr val="FFFFFF"/>
+                </a:solidFill>
+                <a:latin typeface="맑은 고딕"/>
+                <a:ea typeface="맑은 고딕"/>
+                <a:cs typeface="맑은 고딕"/>
+              </a:rPr>
+              <a:t>{%cover}</a:t>
+            </a:r>
+          </a:p>
+        </p:txBody>
+      </p:sp>
+      <p:pic>
+        <p:nvPicPr>
           <p:cNvPr id="5" name="Picture 4" descr="samkoo.png"/>
           <p:cNvPicPr>
             <a:picLocks noChangeAspect="1"/>
@@ -3254,7 +3227,7 @@
         </p:nvSpPr>
         <p:spPr>
           <a:xfrm>
-            <a:off x="571500" y="2268855"/>
+            <a:off x="571500" y="578168"/>
             <a:ext cx="6096000" cy="228600"/>
           </a:xfrm>
           <a:prstGeom prst="rect">
@@ -3270,7 +3243,7 @@
             <a:r>
               <a:rPr sz="1200" b="1" spc="225">
                 <a:solidFill>
-                  <a:srgbClr val="CFE0F5"/>
+                  <a:srgbClr val="111111"/>
                 </a:solidFill>
                 <a:latin typeface="맑은 고딕"/>
                 <a:ea typeface="맑은 고딕"/>
@@ -3289,8 +3262,8 @@
         </p:nvSpPr>
         <p:spPr>
           <a:xfrm>
-            <a:off x="571500" y="2535555"/>
-            <a:ext cx="6096000" cy="214312"/>
+            <a:off x="571500" y="1192530"/>
+            <a:ext cx="8572500" cy="607695"/>
           </a:xfrm>
           <a:prstGeom prst="rect">
             <a:avLst/>
@@ -3303,44 +3276,9 @@
           <a:p>
             <a:pPr algn="l"/>
             <a:r>
-              <a:rPr sz="1125" b="0" spc="150">
-                <a:solidFill>
-                  <a:srgbClr val="9DB8DD"/>
-                </a:solidFill>
-                <a:latin typeface="맑은 고딕"/>
-                <a:ea typeface="맑은 고딕"/>
-                <a:cs typeface="맑은 고딕"/>
-              </a:rPr>
-              <a:t>{표지종류}</a:t>
-            </a:r>
-          </a:p>
-        </p:txBody>
-      </p:sp>
-      <p:sp>
-        <p:nvSpPr>
-          <p:cNvPr id="8" name="TextBox 7"/>
-          <p:cNvSpPr txBox="1"/>
-          <p:nvPr/>
-        </p:nvSpPr>
-        <p:spPr>
-          <a:xfrm>
-            <a:off x="571500" y="2883218"/>
-            <a:ext cx="8572500" cy="607695"/>
-          </a:xfrm>
-          <a:prstGeom prst="rect">
-            <a:avLst/>
-          </a:prstGeom>
-          <a:noFill/>
-        </p:spPr>
-        <p:txBody>
-          <a:bodyPr wrap="square" anchor="ctr" lIns="0" tIns="0" rIns="0" bIns="0"/>
-          <a:lstStyle/>
-          <a:p>
-            <a:pPr algn="l"/>
-            <a:r>
               <a:rPr sz="4350" b="1">
                 <a:solidFill>
-                  <a:srgbClr val="FFFFFF"/>
+                  <a:srgbClr val="111111"/>
                 </a:solidFill>
                 <a:latin typeface="맑은 고딕"/>
                 <a:ea typeface="맑은 고딕"/>
@@ -3353,14 +3291,14 @@
       </p:sp>
       <p:sp>
         <p:nvSpPr>
-          <p:cNvPr id="9" name="TextBox 8"/>
+          <p:cNvPr id="8" name="TextBox 7"/>
           <p:cNvSpPr txBox="1"/>
           <p:nvPr/>
         </p:nvSpPr>
         <p:spPr>
           <a:xfrm>
-            <a:off x="571500" y="3548062"/>
-            <a:ext cx="8572500" cy="428625"/>
+            <a:off x="571500" y="1969770"/>
+            <a:ext cx="8572500" cy="274320"/>
           </a:xfrm>
           <a:prstGeom prst="rect">
             <a:avLst/>
@@ -3373,74 +3311,28 @@
           <a:p>
             <a:pPr algn="l"/>
             <a:r>
-              <a:rPr sz="2250" b="1">
+              <a:rPr sz="1200" b="0">
                 <a:solidFill>
-                  <a:srgbClr val="EAF1FB"/>
+                  <a:srgbClr val="111111"/>
                 </a:solidFill>
                 <a:latin typeface="맑은 고딕"/>
                 <a:ea typeface="맑은 고딕"/>
                 <a:cs typeface="맑은 고딕"/>
               </a:rPr>
-              <a:t>{촬영명}</a:t>
-            </a:r>
-          </a:p>
-        </p:txBody>
-      </p:sp>
-      <p:sp>
-        <p:nvSpPr>
-          <p:cNvPr id="10" name="Rounded Rectangle 9"/>
-          <p:cNvSpPr/>
-          <p:nvPr/>
-        </p:nvSpPr>
-        <p:spPr>
-          <a:xfrm>
-            <a:off x="571500" y="4205288"/>
-            <a:ext cx="857250" cy="38100"/>
-          </a:xfrm>
-          <a:prstGeom prst="roundRect">
-            <a:avLst>
-              <a:gd name="adj" fmla="val 50000"/>
-            </a:avLst>
-          </a:prstGeom>
-          <a:solidFill>
-            <a:srgbClr val="4F86D6"/>
-          </a:solidFill>
-          <a:ln>
-            <a:noFill/>
-          </a:ln>
-          <a:effectLst/>
-        </p:spPr>
-        <p:style>
-          <a:lnRef idx="1">
-            <a:schemeClr val="accent1"/>
-          </a:lnRef>
-          <a:fillRef idx="3">
-            <a:schemeClr val="accent1"/>
-          </a:fillRef>
-          <a:effectRef idx="2">
-            <a:schemeClr val="accent1"/>
-          </a:effectRef>
-          <a:fontRef idx="minor">
-            <a:schemeClr val="lt1"/>
-          </a:fontRef>
-        </p:style>
-        <p:txBody>
-          <a:bodyPr rtlCol="0" anchor="ctr" lIns="0" rIns="0" tIns="0" bIns="0"/>
-          <a:lstStyle/>
-          <a:p>
-            <a:pPr algn="ctr"/>
-          </a:p>
-        </p:txBody>
-      </p:sp>
-      <p:sp>
-        <p:nvSpPr>
-          <p:cNvPr id="11" name="TextBox 10"/>
+              <a:t>촬영 명 : {촬영명}</a:t>
+            </a:r>
+          </a:p>
+        </p:txBody>
+      </p:sp>
+      <p:sp>
+        <p:nvSpPr>
+          <p:cNvPr id="9" name="TextBox 8"/>
           <p:cNvSpPr txBox="1"/>
           <p:nvPr/>
         </p:nvSpPr>
         <p:spPr>
           <a:xfrm>
-            <a:off x="571500" y="4471988"/>
+            <a:off x="571500" y="2370772"/>
             <a:ext cx="8572500" cy="274320"/>
           </a:xfrm>
           <a:prstGeom prst="rect">
@@ -3456,7 +3348,7 @@
             <a:r>
               <a:rPr sz="1200" b="0">
                 <a:solidFill>
-                  <a:srgbClr val="DBE6F6"/>
+                  <a:srgbClr val="111111"/>
                 </a:solidFill>
                 <a:latin typeface="맑은 고딕"/>
                 <a:ea typeface="맑은 고딕"/>
@@ -3469,13 +3361,13 @@
       </p:sp>
       <p:sp>
         <p:nvSpPr>
-          <p:cNvPr id="12" name="TextBox 11"/>
+          <p:cNvPr id="10" name="TextBox 9"/>
           <p:cNvSpPr txBox="1"/>
           <p:nvPr/>
         </p:nvSpPr>
         <p:spPr>
           <a:xfrm>
-            <a:off x="571500" y="4746308"/>
+            <a:off x="571500" y="2767012"/>
             <a:ext cx="8572500" cy="274320"/>
           </a:xfrm>
           <a:prstGeom prst="rect">
@@ -3491,7 +3383,7 @@
             <a:r>
               <a:rPr sz="1200" b="0">
                 <a:solidFill>
-                  <a:srgbClr val="DBE6F6"/>
+                  <a:srgbClr val="111111"/>
                 </a:solidFill>
                 <a:latin typeface="맑은 고딕"/>
                 <a:ea typeface="맑은 고딕"/>
@@ -3504,13 +3396,13 @@
       </p:sp>
       <p:sp>
         <p:nvSpPr>
-          <p:cNvPr id="13" name="TextBox 12"/>
+          <p:cNvPr id="11" name="TextBox 10"/>
           <p:cNvSpPr txBox="1"/>
           <p:nvPr/>
         </p:nvSpPr>
         <p:spPr>
           <a:xfrm>
-            <a:off x="571500" y="5019675"/>
+            <a:off x="571500" y="3163252"/>
             <a:ext cx="8572500" cy="274320"/>
           </a:xfrm>
           <a:prstGeom prst="rect">
@@ -3526,7 +3418,7 @@
             <a:r>
               <a:rPr sz="1200" b="0">
                 <a:solidFill>
-                  <a:srgbClr val="DBE6F6"/>
+                  <a:srgbClr val="111111"/>
                 </a:solidFill>
                 <a:latin typeface="맑은 고딕"/>
                 <a:ea typeface="맑은 고딕"/>
@@ -3539,7 +3431,7 @@
       </p:sp>
       <p:sp>
         <p:nvSpPr>
-          <p:cNvPr id="14" name="Rectangle 13"/>
+          <p:cNvPr id="12" name="Rectangle 11"/>
           <p:cNvSpPr/>
           <p:nvPr/>
         </p:nvSpPr>
